--- a/data-eng/decks/w2d2s0.pptx
+++ b/data-eng/decks/w2d2s0.pptx
@@ -3098,7 +3098,7 @@
       <p:grpSpPr/>
       <p:sp>
         <p:nvSpPr>
-          <p:cNvPr id="2" name="Oval 1"/>
+          <p:cNvPr id="2" name="deckgen:decor"/>
           <p:cNvSpPr/>
           <p:nvPr/>
         </p:nvSpPr>
@@ -3128,7 +3128,7 @@
       </p:sp>
       <p:sp>
         <p:nvSpPr>
-          <p:cNvPr id="3" name="Oval 2"/>
+          <p:cNvPr id="3" name="deckgen:decor"/>
           <p:cNvSpPr/>
           <p:nvPr/>
         </p:nvSpPr>
@@ -3158,7 +3158,7 @@
       </p:sp>
       <p:sp>
         <p:nvSpPr>
-          <p:cNvPr id="4" name="Oval 3"/>
+          <p:cNvPr id="4" name="deckgen:decor"/>
           <p:cNvSpPr/>
           <p:nvPr/>
         </p:nvSpPr>
@@ -3188,7 +3188,7 @@
       </p:sp>
       <p:sp>
         <p:nvSpPr>
-          <p:cNvPr id="5" name="Rectangle 4"/>
+          <p:cNvPr id="5" name="deckgen:decor"/>
           <p:cNvSpPr/>
           <p:nvPr/>
         </p:nvSpPr>
@@ -3218,7 +3218,7 @@
       </p:sp>
       <p:sp>
         <p:nvSpPr>
-          <p:cNvPr id="6" name="Oval 5"/>
+          <p:cNvPr id="6" name="deckgen:decor"/>
           <p:cNvSpPr/>
           <p:nvPr/>
         </p:nvSpPr>
@@ -3248,7 +3248,7 @@
       </p:sp>
       <p:sp>
         <p:nvSpPr>
-          <p:cNvPr id="7" name="Oval 6"/>
+          <p:cNvPr id="7" name="deckgen:decor"/>
           <p:cNvSpPr/>
           <p:nvPr/>
         </p:nvSpPr>
@@ -3278,7 +3278,7 @@
       </p:sp>
       <p:sp>
         <p:nvSpPr>
-          <p:cNvPr id="8" name="Oval 7"/>
+          <p:cNvPr id="8" name="deckgen:decor"/>
           <p:cNvSpPr/>
           <p:nvPr/>
         </p:nvSpPr>
@@ -3308,7 +3308,7 @@
       </p:sp>
       <p:sp>
         <p:nvSpPr>
-          <p:cNvPr id="9" name="Oval 8"/>
+          <p:cNvPr id="9" name="deckgen:decor"/>
           <p:cNvSpPr/>
           <p:nvPr/>
         </p:nvSpPr>
@@ -3338,7 +3338,7 @@
       </p:sp>
       <p:sp>
         <p:nvSpPr>
-          <p:cNvPr id="10" name="Rectangle 9"/>
+          <p:cNvPr id="10" name="deckgen:decor"/>
           <p:cNvSpPr/>
           <p:nvPr/>
         </p:nvSpPr>
@@ -3598,7 +3598,7 @@
       <p:grpSpPr/>
       <p:sp>
         <p:nvSpPr>
-          <p:cNvPr id="2" name="Oval 1"/>
+          <p:cNvPr id="2" name="deckgen:decor"/>
           <p:cNvSpPr/>
           <p:nvPr/>
         </p:nvSpPr>
@@ -3628,7 +3628,7 @@
       </p:sp>
       <p:sp>
         <p:nvSpPr>
-          <p:cNvPr id="3" name="Oval 2"/>
+          <p:cNvPr id="3" name="deckgen:decor"/>
           <p:cNvSpPr/>
           <p:nvPr/>
         </p:nvSpPr>
@@ -3658,7 +3658,7 @@
       </p:sp>
       <p:sp>
         <p:nvSpPr>
-          <p:cNvPr id="4" name="Oval 3"/>
+          <p:cNvPr id="4" name="deckgen:decor"/>
           <p:cNvSpPr/>
           <p:nvPr/>
         </p:nvSpPr>
@@ -4443,7 +4443,7 @@
       <p:grpSpPr/>
       <p:sp>
         <p:nvSpPr>
-          <p:cNvPr id="2" name="Oval 1"/>
+          <p:cNvPr id="2" name="deckgen:decor"/>
           <p:cNvSpPr/>
           <p:nvPr/>
         </p:nvSpPr>
@@ -4473,7 +4473,7 @@
       </p:sp>
       <p:sp>
         <p:nvSpPr>
-          <p:cNvPr id="3" name="Oval 2"/>
+          <p:cNvPr id="3" name="deckgen:decor"/>
           <p:cNvSpPr/>
           <p:nvPr/>
         </p:nvSpPr>
@@ -4503,7 +4503,7 @@
       </p:sp>
       <p:sp>
         <p:nvSpPr>
-          <p:cNvPr id="4" name="Oval 3"/>
+          <p:cNvPr id="4" name="deckgen:decor"/>
           <p:cNvSpPr/>
           <p:nvPr/>
         </p:nvSpPr>
@@ -4784,7 +4784,7 @@
                 <a:ea typeface="Pretendard"/>
                 <a:cs typeface="Pretendard"/>
               </a:rPr>
-              <a:t>1 Docker 켜짐</a:t>
+              <a:t>1. Docker 켜짐</a:t>
             </a:r>
           </a:p>
         </p:txBody>
@@ -4930,7 +4930,7 @@
                 <a:ea typeface="Pretendard"/>
                 <a:cs typeface="Pretendard"/>
               </a:rPr>
-              <a:t>2 켜고 기다리기</a:t>
+              <a:t>2. 켜고 기다리기</a:t>
             </a:r>
           </a:p>
         </p:txBody>
@@ -5076,7 +5076,7 @@
                 <a:ea typeface="Pretendard"/>
                 <a:cs typeface="Pretendard"/>
               </a:rPr>
-              <a:t>3 한글 확인</a:t>
+              <a:t>3. 한글 확인</a:t>
             </a:r>
           </a:p>
         </p:txBody>
@@ -5222,7 +5222,7 @@
                 <a:ea typeface="Pretendard"/>
                 <a:cs typeface="Pretendard"/>
               </a:rPr>
-              <a:t>4 재설정</a:t>
+              <a:t>4. 재설정</a:t>
             </a:r>
           </a:p>
         </p:txBody>
@@ -5400,7 +5400,7 @@
       <p:grpSpPr/>
       <p:sp>
         <p:nvSpPr>
-          <p:cNvPr id="2" name="Oval 1"/>
+          <p:cNvPr id="2" name="deckgen:decor"/>
           <p:cNvSpPr/>
           <p:nvPr/>
         </p:nvSpPr>
@@ -5430,7 +5430,7 @@
       </p:sp>
       <p:sp>
         <p:nvSpPr>
-          <p:cNvPr id="3" name="Oval 2"/>
+          <p:cNvPr id="3" name="deckgen:decor"/>
           <p:cNvSpPr/>
           <p:nvPr/>
         </p:nvSpPr>
@@ -5460,7 +5460,7 @@
       </p:sp>
       <p:sp>
         <p:nvSpPr>
-          <p:cNvPr id="4" name="Oval 3"/>
+          <p:cNvPr id="4" name="deckgen:decor"/>
           <p:cNvSpPr/>
           <p:nvPr/>
         </p:nvSpPr>
@@ -6427,7 +6427,7 @@
       <p:grpSpPr/>
       <p:sp>
         <p:nvSpPr>
-          <p:cNvPr id="2" name="Oval 1"/>
+          <p:cNvPr id="2" name="deckgen:decor"/>
           <p:cNvSpPr/>
           <p:nvPr/>
         </p:nvSpPr>
@@ -6457,7 +6457,7 @@
       </p:sp>
       <p:sp>
         <p:nvSpPr>
-          <p:cNvPr id="3" name="Oval 2"/>
+          <p:cNvPr id="3" name="deckgen:decor"/>
           <p:cNvSpPr/>
           <p:nvPr/>
         </p:nvSpPr>
@@ -6487,7 +6487,7 @@
       </p:sp>
       <p:sp>
         <p:nvSpPr>
-          <p:cNvPr id="4" name="Oval 3"/>
+          <p:cNvPr id="4" name="deckgen:decor"/>
           <p:cNvSpPr/>
           <p:nvPr/>
         </p:nvSpPr>
@@ -7454,7 +7454,7 @@
       <p:grpSpPr/>
       <p:sp>
         <p:nvSpPr>
-          <p:cNvPr id="2" name="Oval 1"/>
+          <p:cNvPr id="2" name="deckgen:decor"/>
           <p:cNvSpPr/>
           <p:nvPr/>
         </p:nvSpPr>
@@ -7484,7 +7484,7 @@
       </p:sp>
       <p:sp>
         <p:nvSpPr>
-          <p:cNvPr id="3" name="Oval 2"/>
+          <p:cNvPr id="3" name="deckgen:decor"/>
           <p:cNvSpPr/>
           <p:nvPr/>
         </p:nvSpPr>
@@ -7514,7 +7514,7 @@
       </p:sp>
       <p:sp>
         <p:nvSpPr>
-          <p:cNvPr id="4" name="Oval 3"/>
+          <p:cNvPr id="4" name="deckgen:decor"/>
           <p:cNvSpPr/>
           <p:nvPr/>
         </p:nvSpPr>
@@ -9066,7 +9066,7 @@
       <p:grpSpPr/>
       <p:sp>
         <p:nvSpPr>
-          <p:cNvPr id="2" name="Oval 1"/>
+          <p:cNvPr id="2" name="deckgen:decor"/>
           <p:cNvSpPr/>
           <p:nvPr/>
         </p:nvSpPr>
@@ -9096,7 +9096,7 @@
       </p:sp>
       <p:sp>
         <p:nvSpPr>
-          <p:cNvPr id="3" name="Oval 2"/>
+          <p:cNvPr id="3" name="deckgen:decor"/>
           <p:cNvSpPr/>
           <p:nvPr/>
         </p:nvSpPr>
@@ -9126,7 +9126,7 @@
       </p:sp>
       <p:sp>
         <p:nvSpPr>
-          <p:cNvPr id="4" name="Oval 3"/>
+          <p:cNvPr id="4" name="deckgen:decor"/>
           <p:cNvSpPr/>
           <p:nvPr/>
         </p:nvSpPr>
@@ -10093,7 +10093,7 @@
       <p:grpSpPr/>
       <p:sp>
         <p:nvSpPr>
-          <p:cNvPr id="2" name="Oval 1"/>
+          <p:cNvPr id="2" name="deckgen:decor"/>
           <p:cNvSpPr/>
           <p:nvPr/>
         </p:nvSpPr>
@@ -10123,7 +10123,7 @@
       </p:sp>
       <p:sp>
         <p:nvSpPr>
-          <p:cNvPr id="3" name="Oval 2"/>
+          <p:cNvPr id="3" name="deckgen:decor"/>
           <p:cNvSpPr/>
           <p:nvPr/>
         </p:nvSpPr>
@@ -10153,7 +10153,7 @@
       </p:sp>
       <p:sp>
         <p:nvSpPr>
-          <p:cNvPr id="4" name="Oval 3"/>
+          <p:cNvPr id="4" name="deckgen:decor"/>
           <p:cNvSpPr/>
           <p:nvPr/>
         </p:nvSpPr>
@@ -11009,7 +11009,7 @@
       <p:grpSpPr/>
       <p:sp>
         <p:nvSpPr>
-          <p:cNvPr id="2" name="Oval 1"/>
+          <p:cNvPr id="2" name="deckgen:decor"/>
           <p:cNvSpPr/>
           <p:nvPr/>
         </p:nvSpPr>
@@ -11039,7 +11039,7 @@
       </p:sp>
       <p:sp>
         <p:nvSpPr>
-          <p:cNvPr id="3" name="Oval 2"/>
+          <p:cNvPr id="3" name="deckgen:decor"/>
           <p:cNvSpPr/>
           <p:nvPr/>
         </p:nvSpPr>
